--- a/Foundation_F5/Workshop/F5-W05_Apply_Workshop_L09-L10_Health_Week_Ask_the_Doctor.pptx
+++ b/Foundation_F5/Workshop/F5-W05_Apply_Workshop_L09-L10_Health_Week_Ask_the_Doctor.pptx
@@ -7436,7 +7436,7 @@
                 <a:latin typeface="Calibri" pitchFamily="34" charset="0"/>
                 <a:cs typeface="Amiri" pitchFamily="2" charset="-78"/>
               </a:rPr>
-              <a:t>Odd numbers come from F5-L09, even numbers from F5-L10. Core: a full sentence from the starter. Develop: add the “more” part. Stretch: link two answers with </a:t>
+              <a:t>Odd numbers come from F5-L09, even numbers from F5-L10. Core: a full sentence from the starter. Develop: add the “more” part. Stretch: link two answers with ‏</a:t>
             </a:r>
             <a:pPr algn="l" indent="0" marL="0">
               <a:buNone/>
@@ -7463,7 +7463,7 @@
                 <a:latin typeface="Calibri" pitchFamily="34" charset="0"/>
                 <a:cs typeface="Amiri" pitchFamily="2" charset="-78"/>
               </a:rPr>
-              <a:t>, </a:t>
+              <a:t>‏, ‏</a:t>
             </a:r>
             <a:pPr algn="l" indent="0" marL="0">
               <a:buNone/>
@@ -7490,7 +7490,7 @@
                 <a:latin typeface="Calibri" pitchFamily="34" charset="0"/>
                 <a:cs typeface="Amiri" pitchFamily="2" charset="-78"/>
               </a:rPr>
-              <a:t> or </a:t>
+              <a:t>‏ or ‏</a:t>
             </a:r>
             <a:pPr algn="l" indent="0" marL="0">
               <a:buNone/>
@@ -7517,7 +7517,7 @@
                 <a:latin typeface="Calibri" pitchFamily="34" charset="0"/>
                 <a:cs typeface="Amiri" pitchFamily="2" charset="-78"/>
               </a:rPr>
-              <a:t>. Swap after each question.</a:t>
+              <a:t>‏. Swap after each question.</a:t>
             </a:r>
             <a:endParaRPr lang="en-US" sz="1100" dirty="0"/>
           </a:p>
@@ -10840,7 +10840,7 @@
                 <a:latin typeface="Calibri" pitchFamily="34" charset="0"/>
                 <a:cs typeface="Amiri" pitchFamily="2" charset="-78"/>
               </a:rPr>
-              <a:t>Add </a:t>
+              <a:t>Add ‏</a:t>
             </a:r>
             <a:pPr algn="l" indent="0" marL="0">
               <a:buNone/>
@@ -10867,7 +10867,7 @@
                 <a:latin typeface="Calibri" pitchFamily="34" charset="0"/>
                 <a:cs typeface="Amiri" pitchFamily="2" charset="-78"/>
               </a:rPr>
-              <a:t> … and </a:t>
+              <a:t> …‏ and ‏</a:t>
             </a:r>
             <a:pPr algn="l" indent="0" marL="0">
               <a:buNone/>
@@ -10894,7 +10894,7 @@
                 <a:latin typeface="Calibri" pitchFamily="34" charset="0"/>
                 <a:cs typeface="Amiri" pitchFamily="2" charset="-78"/>
               </a:rPr>
-              <a:t> …</a:t>
+              <a:t> …‏</a:t>
             </a:r>
             <a:endParaRPr lang="en-US" sz="1150" dirty="0"/>
           </a:p>
@@ -11031,7 +11031,7 @@
                 <a:latin typeface="Calibri" pitchFamily="34" charset="0"/>
                 <a:cs typeface="Amiri" pitchFamily="2" charset="-78"/>
               </a:rPr>
-              <a:t>Give reasons and results: </a:t>
+              <a:t>Give reasons and results: ‏</a:t>
             </a:r>
             <a:pPr algn="l" indent="0" marL="0">
               <a:buNone/>
@@ -11085,7 +11085,7 @@
                 <a:latin typeface="Calibri" pitchFamily="34" charset="0"/>
                 <a:cs typeface="Amiri" pitchFamily="2" charset="-78"/>
               </a:rPr>
-              <a:t> … — and dosage: … </a:t>
+              <a:t> …‏ — and dosage: … ‏</a:t>
             </a:r>
             <a:pPr algn="l" indent="0" marL="0">
               <a:buNone/>
@@ -11112,7 +11112,7 @@
                 <a:latin typeface="Calibri" pitchFamily="34" charset="0"/>
                 <a:cs typeface="Amiri" pitchFamily="2" charset="-78"/>
               </a:rPr>
-              <a:t>.</a:t>
+              <a:t>‏.</a:t>
             </a:r>
             <a:endParaRPr lang="en-US" sz="1150" dirty="0"/>
           </a:p>
@@ -17514,7 +17514,7 @@
                 <a:latin typeface="Calibri" pitchFamily="34" charset="0"/>
                 <a:cs typeface="Amiri" pitchFamily="2" charset="-78"/>
               </a:rPr>
-              <a:t>To a girl: </a:t>
+              <a:t>To a girl: ‏</a:t>
             </a:r>
             <a:pPr algn="l" indent="0" marL="0">
               <a:buNone/>
@@ -17541,7 +17541,7 @@
                 <a:latin typeface="Calibri" pitchFamily="34" charset="0"/>
                 <a:cs typeface="Amiri" pitchFamily="2" charset="-78"/>
               </a:rPr>
-              <a:t>.</a:t>
+              <a:t>‏.</a:t>
             </a:r>
             <a:endParaRPr lang="en-US" sz="1150" dirty="0"/>
           </a:p>
@@ -17745,6 +17745,19 @@
               <a:buNone/>
             </a:pPr>
             <a:r>
+              <a:rPr lang="en-US" sz="1150" b="1" dirty="0">
+                <a:solidFill>
+                  <a:srgbClr val="1B3B6F"/>
+                </a:solidFill>
+                <a:latin typeface="Calibri" pitchFamily="34" charset="0"/>
+                <a:cs typeface="Amiri" pitchFamily="2" charset="-78"/>
+              </a:rPr>
+              <a:t>‏</a:t>
+            </a:r>
+            <a:pPr algn="l" indent="0" marL="0">
+              <a:buNone/>
+            </a:pPr>
+            <a:r>
               <a:rPr lang="ar-SA" altLang="en-US" sz="1500" b="1" dirty="0">
                 <a:solidFill>
                   <a:srgbClr val="1B3B6F"/>
@@ -17766,7 +17779,7 @@
                 <a:latin typeface="Calibri" pitchFamily="34" charset="0"/>
                 <a:cs typeface="Amiri" pitchFamily="2" charset="-78"/>
               </a:rPr>
-              <a:t> + verb ending in -a.</a:t>
+              <a:t>‏ + verb ending in -a.</a:t>
             </a:r>
             <a:endParaRPr lang="en-US" sz="1150" dirty="0"/>
           </a:p>
@@ -17970,6 +17983,19 @@
               <a:buNone/>
             </a:pPr>
             <a:r>
+              <a:rPr lang="en-US" sz="1150" b="1" dirty="0">
+                <a:solidFill>
+                  <a:srgbClr val="1B3B6F"/>
+                </a:solidFill>
+                <a:latin typeface="Calibri" pitchFamily="34" charset="0"/>
+                <a:cs typeface="Amiri" pitchFamily="2" charset="-78"/>
+              </a:rPr>
+              <a:t>‏</a:t>
+            </a:r>
+            <a:pPr algn="l" indent="0" marL="0">
+              <a:buNone/>
+            </a:pPr>
+            <a:r>
               <a:rPr lang="ar-SA" altLang="en-US" sz="1500" b="1" dirty="0">
                 <a:solidFill>
                   <a:srgbClr val="1B3B6F"/>
@@ -17991,7 +18017,7 @@
                 <a:latin typeface="Calibri" pitchFamily="34" charset="0"/>
                 <a:cs typeface="Amiri" pitchFamily="2" charset="-78"/>
               </a:rPr>
-              <a:t> + verb in -a.</a:t>
+              <a:t>‏ + verb in -a.</a:t>
             </a:r>
             <a:endParaRPr lang="en-US" sz="1150" dirty="0"/>
           </a:p>
@@ -20114,7 +20140,7 @@
                 <a:latin typeface="Calibri" pitchFamily="34" charset="0"/>
                 <a:cs typeface="Amiri" pitchFamily="2" charset="-78"/>
               </a:rPr>
-              <a:t>☐  At least one </a:t>
+              <a:t>☐  At least one ‏</a:t>
             </a:r>
             <a:pPr algn="l" indent="0" marL="0">
               <a:buNone/>
@@ -20141,7 +20167,7 @@
                 <a:latin typeface="Calibri" pitchFamily="34" charset="0"/>
                 <a:cs typeface="Amiri" pitchFamily="2" charset="-78"/>
               </a:rPr>
-              <a:t> and one </a:t>
+              <a:t>‏ and one ‏</a:t>
             </a:r>
             <a:pPr algn="l" indent="0" marL="0">
               <a:buNone/>
@@ -20168,7 +20194,7 @@
                 <a:latin typeface="Calibri" pitchFamily="34" charset="0"/>
                 <a:cs typeface="Amiri" pitchFamily="2" charset="-78"/>
               </a:rPr>
-              <a:t> (Develop).</a:t>
+              <a:t>‏ (Develop).</a:t>
             </a:r>
             <a:endParaRPr lang="en-US" sz="1200" dirty="0"/>
           </a:p>
@@ -23492,7 +23518,7 @@
                 <a:latin typeface="Calibri" pitchFamily="34" charset="0"/>
                 <a:cs typeface="Amiri" pitchFamily="2" charset="-78"/>
               </a:rPr>
-              <a:t>explain the problem with </a:t>
+              <a:t>explain the problem with ‏</a:t>
             </a:r>
             <a:pPr algn="l" indent="0" marL="0">
               <a:buNone/>
@@ -23519,7 +23545,7 @@
                 <a:latin typeface="Calibri" pitchFamily="34" charset="0"/>
                 <a:cs typeface="Amiri" pitchFamily="2" charset="-78"/>
               </a:rPr>
-              <a:t> …?</a:t>
+              <a:t> …‏?</a:t>
             </a:r>
             <a:endParaRPr lang="en-US" sz="1100" dirty="0"/>
           </a:p>
@@ -23743,7 +23769,7 @@
                 <a:latin typeface="Calibri" pitchFamily="34" charset="0"/>
                 <a:cs typeface="Amiri" pitchFamily="2" charset="-78"/>
               </a:rPr>
-              <a:t>use three strengths of advice and both </a:t>
+              <a:t>use three strengths of advice and both ‏</a:t>
             </a:r>
             <a:pPr algn="l" indent="0" marL="0">
               <a:buNone/>
@@ -23770,7 +23796,7 @@
                 <a:latin typeface="Calibri" pitchFamily="34" charset="0"/>
                 <a:cs typeface="Amiri" pitchFamily="2" charset="-78"/>
               </a:rPr>
-              <a:t> and </a:t>
+              <a:t>‏ and ‏</a:t>
             </a:r>
             <a:pPr algn="l" indent="0" marL="0">
               <a:buNone/>
@@ -23797,7 +23823,7 @@
                 <a:latin typeface="Calibri" pitchFamily="34" charset="0"/>
                 <a:cs typeface="Amiri" pitchFamily="2" charset="-78"/>
               </a:rPr>
-              <a:t>?</a:t>
+              <a:t>‏?</a:t>
             </a:r>
             <a:endParaRPr lang="en-US" sz="1100" dirty="0"/>
           </a:p>
@@ -23956,7 +23982,7 @@
                 <a:latin typeface="Calibri" pitchFamily="34" charset="0"/>
                 <a:cs typeface="Amiri" pitchFamily="2" charset="-78"/>
               </a:rPr>
-              <a:t>use linking words (</a:t>
+              <a:t>use linking words (‏</a:t>
             </a:r>
             <a:pPr algn="l" indent="0" marL="0">
               <a:buNone/>
@@ -24064,7 +24090,7 @@
                 <a:latin typeface="Calibri" pitchFamily="34" charset="0"/>
                 <a:cs typeface="Amiri" pitchFamily="2" charset="-78"/>
               </a:rPr>
-              <a:t>)?</a:t>
+              <a:t>‏)?</a:t>
             </a:r>
             <a:endParaRPr lang="en-US" sz="1100" dirty="0"/>
           </a:p>
@@ -28010,7 +28036,7 @@
                 <a:latin typeface="Calibri" pitchFamily="34" charset="0"/>
                 <a:cs typeface="Amiri" pitchFamily="2" charset="-78"/>
               </a:rPr>
-              <a:t>I added reasons (</a:t>
+              <a:t>I added reasons (‏</a:t>
             </a:r>
             <a:pPr algn="l" indent="0" marL="0">
               <a:buNone/>
@@ -28037,7 +28063,7 @@
                 <a:latin typeface="Calibri" pitchFamily="34" charset="0"/>
                 <a:cs typeface="Amiri" pitchFamily="2" charset="-78"/>
               </a:rPr>
-              <a:t>) and extra details without frames.</a:t>
+              <a:t>‏) and extra details without frames.</a:t>
             </a:r>
             <a:endParaRPr lang="en-US" sz="1300" dirty="0"/>
           </a:p>
@@ -32165,7 +32191,7 @@
                 <a:latin typeface="Calibri" pitchFamily="34" charset="0"/>
                 <a:cs typeface="Amiri" pitchFamily="2" charset="-78"/>
               </a:rPr>
-              <a:t>☐  Add a reason (</a:t>
+              <a:t>☐  Add a reason (‏</a:t>
             </a:r>
             <a:pPr algn="l" indent="0" marL="0">
               <a:buNone/>
@@ -32192,7 +32218,7 @@
                 <a:latin typeface="Calibri" pitchFamily="34" charset="0"/>
                 <a:cs typeface="Amiri" pitchFamily="2" charset="-78"/>
               </a:rPr>
-              <a:t>) and an extra detail to every point.</a:t>
+              <a:t>‏) and an extra detail to every point.</a:t>
             </a:r>
             <a:endParaRPr lang="en-US" sz="1300" dirty="0"/>
           </a:p>
@@ -33713,7 +33739,7 @@
                 <a:latin typeface="Calibri" pitchFamily="34" charset="0"/>
                 <a:cs typeface="Amiri" pitchFamily="2" charset="-78"/>
               </a:rPr>
-              <a:t>Join a word from each lesson in one sentence with </a:t>
+              <a:t>Join a word from each lesson in one sentence with ‏</a:t>
             </a:r>
             <a:pPr algn="l" indent="0" marL="0">
               <a:buNone/>
@@ -33740,7 +33766,7 @@
                 <a:latin typeface="Calibri" pitchFamily="34" charset="0"/>
                 <a:cs typeface="Amiri" pitchFamily="2" charset="-78"/>
               </a:rPr>
-              <a:t> or </a:t>
+              <a:t>‏ or ‏</a:t>
             </a:r>
             <a:pPr algn="l" indent="0" marL="0">
               <a:buNone/>
@@ -33767,7 +33793,7 @@
                 <a:latin typeface="Calibri" pitchFamily="34" charset="0"/>
                 <a:cs typeface="Amiri" pitchFamily="2" charset="-78"/>
               </a:rPr>
-              <a:t>.</a:t>
+              <a:t>‏.</a:t>
             </a:r>
             <a:endParaRPr lang="en-US" sz="1150" dirty="0"/>
           </a:p>
